--- a/courses/learn_placement/module02-07-sa-placement/slides.pptx
+++ b/courses/learn_placement/module02-07-sa-placement/slides.pptx
@@ -16,6 +16,9 @@
     <p:sldId id="264" r:id="rId16"/>
     <p:sldId id="265" r:id="rId17"/>
     <p:sldId id="266" r:id="rId18"/>
+    <p:sldId id="267" r:id="rId19"/>
+    <p:sldId id="268" r:id="rId20"/>
+    <p:sldId id="269" r:id="rId21"/>
   </p:sldIdLst>
   <p:sldSz cx="12191695" cy="6858000" type="screen4x3"/>
   <p:notesSz cx="6858000" cy="9144000"/>
@@ -582,7 +585,7 @@
           <a:lstStyle/>
           <a:p>
             <a:r>
-              <a:t>Common traps: celebrating HPWL while cells pile into one bin; ignoring fixed pads A and D; mixing bbox and clique models in one report; keeping only the final SA iterate instead of the best; and forgetting that timing weights change the objective, not just the label.</a:t>
+              <a:t>In the browser lab track, open the **sa-placement** lab from the tools shelf. Load the starter placement, run the algorithm once, and read HPWL—and density when the panel shows it. Work the challenges that lock the goldens, then come back to implement the same loop yourself.</a:t>
             </a:r>
           </a:p>
         </p:txBody>
@@ -652,6 +655,146 @@
           <a:lstStyle/>
           <a:p>
             <a:r>
+              <a:t>In the implement track, open this module's EXAMPLES.md Pseudocode section and the course common solvers. Parse `tiny_place.json`, run the algorithm with a deterministic seed, and print coordinates plus HPWL. Match the browser goldens before you claim the checklist.</a:t>
+            </a:r>
+          </a:p>
+        </p:txBody>
+      </p:sp>
+      <p:sp>
+        <p:nvSpPr>
+          <p:cNvPr id="4" name="Slide Number Placeholder 3"/>
+          <p:cNvSpPr>
+            <a:spLocks noGrp="1"/>
+          </p:cNvSpPr>
+          <p:nvPr>
+            <p:ph type="sldNum" idx="5" sz="quarter"/>
+          </p:nvPr>
+        </p:nvSpPr>
+        <p:spPr/>
+      </p:sp>
+    </p:spTree>
+  </p:cSld>
+  <p:clrMapOvr>
+    <a:masterClrMapping/>
+  </p:clrMapOvr>
+</p:notes>
+</file>
+
+<file path=ppt/notesSlides/notesSlide12.xml><?xml version="1.0" encoding="utf-8"?>
+<p:notes xmlns:a="http://schemas.openxmlformats.org/drawingml/2006/main" xmlns:p="http://schemas.openxmlformats.org/presentationml/2006/main" xmlns:r="http://schemas.openxmlformats.org/officeDocument/2006/relationships">
+  <p:cSld>
+    <p:spTree>
+      <p:nvGrpSpPr>
+        <p:cNvPr id="1" name=""/>
+        <p:cNvGrpSpPr/>
+        <p:nvPr/>
+      </p:nvGrpSpPr>
+      <p:grpSpPr>
+        <a:xfrm>
+          <a:off x="0" y="0"/>
+          <a:ext cx="0" cy="0"/>
+          <a:chOff x="0" y="0"/>
+          <a:chExt cx="0" cy="0"/>
+        </a:xfrm>
+      </p:grpSpPr>
+      <p:sp>
+        <p:nvSpPr>
+          <p:cNvPr id="2" name="Slide Image Placeholder 1"/>
+          <p:cNvSpPr>
+            <a:spLocks noGrp="1"/>
+          </p:cNvSpPr>
+          <p:nvPr>
+            <p:ph type="sldImg" idx="2"/>
+          </p:nvPr>
+        </p:nvSpPr>
+        <p:spPr/>
+      </p:sp>
+      <p:sp>
+        <p:nvSpPr>
+          <p:cNvPr id="3" name="Notes Placeholder 2"/>
+          <p:cNvSpPr>
+            <a:spLocks noGrp="1"/>
+          </p:cNvSpPr>
+          <p:nvPr>
+            <p:ph type="body" idx="3" sz="quarter"/>
+          </p:nvPr>
+        </p:nvSpPr>
+        <p:spPr/>
+        <p:txBody>
+          <a:bodyPr/>
+          <a:lstStyle/>
+          <a:p>
+            <a:r>
+              <a:t>Common traps: celebrating HPWL while cells pile into one bin; ignoring fixed pads A and D; mixing bbox and clique models in one report; keeping only the final SA iterate instead of the best; and forgetting that timing weights change the objective, not just the label.</a:t>
+            </a:r>
+          </a:p>
+        </p:txBody>
+      </p:sp>
+      <p:sp>
+        <p:nvSpPr>
+          <p:cNvPr id="4" name="Slide Number Placeholder 3"/>
+          <p:cNvSpPr>
+            <a:spLocks noGrp="1"/>
+          </p:cNvSpPr>
+          <p:nvPr>
+            <p:ph type="sldNum" idx="5" sz="quarter"/>
+          </p:nvPr>
+        </p:nvSpPr>
+        <p:spPr/>
+      </p:sp>
+    </p:spTree>
+  </p:cSld>
+  <p:clrMapOvr>
+    <a:masterClrMapping/>
+  </p:clrMapOvr>
+</p:notes>
+</file>
+
+<file path=ppt/notesSlides/notesSlide13.xml><?xml version="1.0" encoding="utf-8"?>
+<p:notes xmlns:a="http://schemas.openxmlformats.org/drawingml/2006/main" xmlns:p="http://schemas.openxmlformats.org/presentationml/2006/main" xmlns:r="http://schemas.openxmlformats.org/officeDocument/2006/relationships">
+  <p:cSld>
+    <p:spTree>
+      <p:nvGrpSpPr>
+        <p:cNvPr id="1" name=""/>
+        <p:cNvGrpSpPr/>
+        <p:nvPr/>
+      </p:nvGrpSpPr>
+      <p:grpSpPr>
+        <a:xfrm>
+          <a:off x="0" y="0"/>
+          <a:ext cx="0" cy="0"/>
+          <a:chOff x="0" y="0"/>
+          <a:chExt cx="0" cy="0"/>
+        </a:xfrm>
+      </p:grpSpPr>
+      <p:sp>
+        <p:nvSpPr>
+          <p:cNvPr id="2" name="Slide Image Placeholder 1"/>
+          <p:cNvSpPr>
+            <a:spLocks noGrp="1"/>
+          </p:cNvSpPr>
+          <p:nvPr>
+            <p:ph type="sldImg" idx="2"/>
+          </p:nvPr>
+        </p:nvSpPr>
+        <p:spPr/>
+      </p:sp>
+      <p:sp>
+        <p:nvSpPr>
+          <p:cNvPr id="3" name="Notes Placeholder 2"/>
+          <p:cNvSpPr>
+            <a:spLocks noGrp="1"/>
+          </p:cNvSpPr>
+          <p:nvPr>
+            <p:ph type="body" idx="3" sz="quarter"/>
+          </p:nvPr>
+        </p:nvSpPr>
+        <p:spPr/>
+        <p:txBody>
+          <a:bodyPr/>
+          <a:lstStyle/>
+          <a:p>
+            <a:r>
               <a:t>Complete the checklist for at least one track—preferably both. Implement until your metrics match the starter goldens. When you’re ready, take the short quiz, then continue to the next module.</a:t>
             </a:r>
           </a:p>
@@ -725,12 +868,6 @@
               <a:t>Propose a small axis move, accept improvements always, and accept worsenings with temperature probability. Keep the best iterate, not only the final temperature. Fix the seed so your golden stays stable across runs.</a:t>
             </a:r>
           </a:p>
-          <a:p/>
-          <a:p>
-            <a:r>
-              <a:t>&lt;!-- algorithm-walkthrough --&gt;</a:t>
-            </a:r>
-          </a:p>
         </p:txBody>
       </p:sp>
       <p:sp>
@@ -798,7 +935,13 @@
           <a:lstStyle/>
           <a:p>
             <a:r>
-              <a:t>Simulated annealing jogs one cell at a time under an HPWL cost. Seed forty-two and sixty moves on the starter—deterministic teaching run.</a:t>
+              <a:t>Placement annealing jogs one cell per move under HPWL cost, accepts by Metropolis, and keeps the best iterate—not only the final temperature.</a:t>
+            </a:r>
+          </a:p>
+          <a:p/>
+          <a:p>
+            <a:r>
+              <a:t>Open this module's examples file and find the Pseudocode section. That written sketch is what you implement on the implement track and what the browser challenges measure.</a:t>
             </a:r>
           </a:p>
         </p:txBody>
@@ -868,7 +1011,7 @@
           <a:lstStyle/>
           <a:p>
             <a:r>
-              <a:t>Improvements always accept. Worsenings accept with probability exp(−Δ/T). Temperature cools each move so late stages get pickier.</a:t>
+              <a:t>Seed forty-two with sixty moves yields best HPWL near forty-nine point six from fifty-two. Lock the seed so goldens stay stable.</a:t>
             </a:r>
           </a:p>
         </p:txBody>
@@ -938,7 +1081,7 @@
           <a:lstStyle/>
           <a:p>
             <a:r>
-              <a:t>With seed forty-two the best HPWL lands near forty-nine point six—modest gain over fifty-two. Report best, not only the final temperature.</a:t>
+              <a:t>Simulated annealing jogs one cell at a time under an HPWL cost. Seed forty-two and sixty moves on the starter—deterministic teaching run.</a:t>
             </a:r>
           </a:p>
         </p:txBody>
@@ -1008,7 +1151,7 @@
           <a:lstStyle/>
           <a:p>
             <a:r>
-              <a:t>Change the seed and accept/reject counts drift. Teaching labs lock seed forty-two so forty-nine point six stays a stable challenge.</a:t>
+              <a:t>Improvements always accept. Worsenings accept with probability exp(−Δ/T). Temperature cools each move so late stages get pickier.</a:t>
             </a:r>
           </a:p>
         </p:txBody>
@@ -1078,13 +1221,7 @@
           <a:lstStyle/>
           <a:p>
             <a:r>
-              <a:t>Propose, score, accept or reject, cool, and remember the best. On this instance expect about forty-nine point six—not a force-style collapse.</a:t>
-            </a:r>
-          </a:p>
-          <a:p/>
-          <a:p>
-            <a:r>
-              <a:t>&lt;!-- /algorithm-walkthrough --&gt;</a:t>
+              <a:t>With seed forty-two the best HPWL lands near forty-nine point six—modest gain over fifty-two. Report best, not only the final temperature.</a:t>
             </a:r>
           </a:p>
         </p:txBody>
@@ -1154,7 +1291,7 @@
           <a:lstStyle/>
           <a:p>
             <a:r>
-              <a:t>In the browser lab track, open the **sa-placement** lab from the tools shelf. Load the starter placement, run the algorithm once, and read HPWL—and density when the panel shows it. Work the challenges that lock the goldens, then come back to implement the same loop yourself.</a:t>
+              <a:t>Change the seed and accept/reject counts drift. Teaching labs lock seed forty-two so forty-nine point six stays a stable challenge.</a:t>
             </a:r>
           </a:p>
         </p:txBody>
@@ -1224,7 +1361,7 @@
           <a:lstStyle/>
           <a:p>
             <a:r>
-              <a:t>In the implement track, open this module’s examples and the course `common/` solvers. Parse `tiny_place.json`, run the algorithm with a deterministic seed, and print coordinates plus HPWL. Match the browser goldens before you claim the checklist.</a:t>
+              <a:t>Propose, score, accept or reject, cool, and remember the best. On this instance expect about forty-nine point six—not a force-style collapse.</a:t>
             </a:r>
           </a:p>
         </p:txBody>
@@ -4382,21 +4519,45 @@
                 </a:solidFill>
                 <a:latin typeface="Calibri"/>
               </a:rPr>
-              <a:t>Pitfalls</a:t>
-            </a:r>
-          </a:p>
-        </p:txBody>
-      </p:sp>
-      <p:sp>
-        <p:nvSpPr>
-          <p:cNvPr id="3" name="TextBox 2"/>
+              <a:t>SA is a stochastic local search</a:t>
+            </a:r>
+          </a:p>
+        </p:txBody>
+      </p:sp>
+      <p:pic>
+        <p:nvPicPr>
+          <p:cNvPr id="3" name="Picture 2" descr="05-takeaway.png"/>
+          <p:cNvPicPr>
+            <a:picLocks noChangeAspect="1"/>
+          </p:cNvPicPr>
+          <p:nvPr/>
+        </p:nvPicPr>
+        <p:blipFill>
+          <a:blip r:embed="rId2"/>
+          <a:stretch>
+            <a:fillRect/>
+          </a:stretch>
+        </p:blipFill>
+        <p:spPr>
+          <a:xfrm>
+            <a:off x="548640" y="1143000"/>
+            <a:ext cx="9404113" cy="4572000"/>
+          </a:xfrm>
+          <a:prstGeom prst="rect">
+            <a:avLst/>
+          </a:prstGeom>
+        </p:spPr>
+      </p:pic>
+      <p:sp>
+        <p:nvSpPr>
+          <p:cNvPr id="4" name="TextBox 3"/>
           <p:cNvSpPr txBox="1"/>
           <p:nvPr/>
         </p:nvSpPr>
         <p:spPr>
           <a:xfrm>
-            <a:off x="548640" y="1234440"/>
-            <a:ext cx="11064240" cy="4937760"/>
+            <a:off x="548640" y="5897880"/>
+            <a:ext cx="11064240" cy="411480"/>
           </a:xfrm>
           <a:prstGeom prst="rect">
             <a:avLst/>
@@ -4409,32 +4570,26 @@
           </a:bodyPr>
           <a:lstStyle/>
           <a:p>
-            <a:pPr lvl="0" marL="457200" indent="-228600">
-              <a:buFont typeface="Calibri"/>
-              <a:spcAft>
-                <a:spcPts val="1000"/>
-              </a:spcAft>
-              <a:buSzPct val="100000"/>
-              <a:buChar char="•"/>
+            <a:pPr>
               <a:lnSpc>
                 <a:spcPts val="2200"/>
               </a:lnSpc>
             </a:pPr>
             <a:r>
-              <a:rPr sz="2000" b="0">
+              <a:rPr sz="1200" b="0">
                 <a:solidFill>
                   <a:srgbClr val="333333"/>
                 </a:solidFill>
                 <a:latin typeface="Calibri"/>
               </a:rPr>
-              <a:t>Common traps</a:t>
-            </a:r>
-          </a:p>
-        </p:txBody>
-      </p:sp>
-      <p:sp>
-        <p:nvSpPr>
-          <p:cNvPr id="4" name="TextBox 3"/>
+              <a:t>SA is a stochastic local search</a:t>
+            </a:r>
+          </a:p>
+        </p:txBody>
+      </p:sp>
+      <p:sp>
+        <p:nvSpPr>
+          <p:cNvPr id="5" name="TextBox 4"/>
           <p:cNvSpPr txBox="1"/>
           <p:nvPr/>
         </p:nvSpPr>
@@ -4523,6 +4678,535 @@
                 </a:solidFill>
                 <a:latin typeface="Calibri"/>
               </a:rPr>
+              <a:t>Browser lab track</a:t>
+            </a:r>
+          </a:p>
+        </p:txBody>
+      </p:sp>
+      <p:sp>
+        <p:nvSpPr>
+          <p:cNvPr id="3" name="TextBox 2"/>
+          <p:cNvSpPr txBox="1"/>
+          <p:nvPr/>
+        </p:nvSpPr>
+        <p:spPr>
+          <a:xfrm>
+            <a:off x="548640" y="1234440"/>
+            <a:ext cx="11064240" cy="4937760"/>
+          </a:xfrm>
+          <a:prstGeom prst="rect">
+            <a:avLst/>
+          </a:prstGeom>
+          <a:noFill/>
+        </p:spPr>
+        <p:txBody>
+          <a:bodyPr wrap="square">
+            <a:noAutofit/>
+          </a:bodyPr>
+          <a:lstStyle/>
+          <a:p>
+            <a:pPr lvl="0" marL="457200" indent="-228600">
+              <a:buFont typeface="Calibri"/>
+              <a:spcAft>
+                <a:spcPts val="1000"/>
+              </a:spcAft>
+              <a:buSzPct val="100000"/>
+              <a:buChar char="•"/>
+              <a:lnSpc>
+                <a:spcPts val="2200"/>
+              </a:lnSpc>
+            </a:pPr>
+            <a:r>
+              <a:rPr sz="2000" b="0">
+                <a:solidFill>
+                  <a:srgbClr val="333333"/>
+                </a:solidFill>
+                <a:latin typeface="Calibri"/>
+              </a:rPr>
+              <a:t>In the browser lab track, open the </a:t>
+            </a:r>
+            <a:r>
+              <a:rPr sz="2000" b="1">
+                <a:solidFill>
+                  <a:srgbClr val="333333"/>
+                </a:solidFill>
+                <a:latin typeface="Calibri"/>
+              </a:rPr>
+              <a:t>sa-placement</a:t>
+            </a:r>
+            <a:r>
+              <a:rPr sz="2000" b="0">
+                <a:solidFill>
+                  <a:srgbClr val="333333"/>
+                </a:solidFill>
+                <a:latin typeface="Calibri"/>
+              </a:rPr>
+              <a:t> lab from the tools shelf</a:t>
+            </a:r>
+          </a:p>
+          <a:p>
+            <a:pPr lvl="0" marL="457200" indent="-228600">
+              <a:buFont typeface="Calibri"/>
+              <a:spcAft>
+                <a:spcPts val="1000"/>
+              </a:spcAft>
+              <a:buSzPct val="100000"/>
+              <a:buChar char="•"/>
+              <a:lnSpc>
+                <a:spcPts val="2200"/>
+              </a:lnSpc>
+            </a:pPr>
+            <a:r>
+              <a:rPr sz="2000" b="0">
+                <a:solidFill>
+                  <a:srgbClr val="333333"/>
+                </a:solidFill>
+                <a:latin typeface="Calibri"/>
+              </a:rPr>
+              <a:t>Load the starter placement, run the algorithm once</a:t>
+            </a:r>
+          </a:p>
+          <a:p>
+            <a:pPr lvl="0" marL="457200" indent="-228600">
+              <a:buFont typeface="Calibri"/>
+              <a:spcAft>
+                <a:spcPts val="1000"/>
+              </a:spcAft>
+              <a:buSzPct val="100000"/>
+              <a:buChar char="•"/>
+              <a:lnSpc>
+                <a:spcPts val="2200"/>
+              </a:lnSpc>
+            </a:pPr>
+            <a:r>
+              <a:rPr sz="2000" b="0">
+                <a:solidFill>
+                  <a:srgbClr val="333333"/>
+                </a:solidFill>
+                <a:latin typeface="Calibri"/>
+              </a:rPr>
+              <a:t>Work the challenges that lock the goldens</a:t>
+            </a:r>
+          </a:p>
+        </p:txBody>
+      </p:sp>
+      <p:sp>
+        <p:nvSpPr>
+          <p:cNvPr id="4" name="TextBox 3"/>
+          <p:cNvSpPr txBox="1"/>
+          <p:nvPr/>
+        </p:nvSpPr>
+        <p:spPr>
+          <a:xfrm>
+            <a:off x="548640" y="6355080"/>
+            <a:ext cx="11064240" cy="320040"/>
+          </a:xfrm>
+          <a:prstGeom prst="rect">
+            <a:avLst/>
+          </a:prstGeom>
+          <a:noFill/>
+        </p:spPr>
+        <p:txBody>
+          <a:bodyPr wrap="square">
+            <a:noAutofit/>
+          </a:bodyPr>
+          <a:lstStyle/>
+          <a:p>
+            <a:pPr algn="r">
+              <a:lnSpc>
+                <a:spcPts val="2200"/>
+              </a:lnSpc>
+              <a:defRPr sz="1000" b="0">
+                <a:solidFill>
+                  <a:srgbClr val="666666"/>
+                </a:solidFill>
+                <a:latin typeface="Calibri"/>
+              </a:defRPr>
+            </a:pPr>
+            <a:r>
+              <a:t>learn_placement — 07 sa placement</a:t>
+            </a:r>
+          </a:p>
+        </p:txBody>
+      </p:sp>
+    </p:spTree>
+  </p:cSld>
+  <p:clrMapOvr>
+    <a:masterClrMapping/>
+  </p:clrMapOvr>
+</p:sld>
+</file>
+
+<file path=ppt/slides/slide12.xml><?xml version="1.0" encoding="utf-8"?>
+<p:sld xmlns:a="http://schemas.openxmlformats.org/drawingml/2006/main" xmlns:p="http://schemas.openxmlformats.org/presentationml/2006/main" xmlns:r="http://schemas.openxmlformats.org/officeDocument/2006/relationships">
+  <p:cSld>
+    <p:spTree>
+      <p:nvGrpSpPr>
+        <p:cNvPr id="1" name=""/>
+        <p:cNvGrpSpPr/>
+        <p:nvPr/>
+      </p:nvGrpSpPr>
+      <p:grpSpPr/>
+      <p:sp>
+        <p:nvSpPr>
+          <p:cNvPr id="2" name="TextBox 1"/>
+          <p:cNvSpPr txBox="1"/>
+          <p:nvPr/>
+        </p:nvSpPr>
+        <p:spPr>
+          <a:xfrm>
+            <a:off x="548640" y="411480"/>
+            <a:ext cx="11064240" cy="777240"/>
+          </a:xfrm>
+          <a:prstGeom prst="rect">
+            <a:avLst/>
+          </a:prstGeom>
+          <a:noFill/>
+        </p:spPr>
+        <p:txBody>
+          <a:bodyPr wrap="square">
+            <a:noAutofit/>
+          </a:bodyPr>
+          <a:lstStyle/>
+          <a:p>
+            <a:pPr>
+              <a:lnSpc>
+                <a:spcPts val="2200"/>
+              </a:lnSpc>
+            </a:pPr>
+            <a:r>
+              <a:rPr sz="2800" b="1">
+                <a:solidFill>
+                  <a:srgbClr val="1A1A2E"/>
+                </a:solidFill>
+                <a:latin typeface="Calibri"/>
+              </a:rPr>
+              <a:t>Implement track</a:t>
+            </a:r>
+          </a:p>
+        </p:txBody>
+      </p:sp>
+      <p:sp>
+        <p:nvSpPr>
+          <p:cNvPr id="3" name="TextBox 2"/>
+          <p:cNvSpPr txBox="1"/>
+          <p:nvPr/>
+        </p:nvSpPr>
+        <p:spPr>
+          <a:xfrm>
+            <a:off x="548640" y="1234440"/>
+            <a:ext cx="11064240" cy="4937760"/>
+          </a:xfrm>
+          <a:prstGeom prst="rect">
+            <a:avLst/>
+          </a:prstGeom>
+          <a:noFill/>
+        </p:spPr>
+        <p:txBody>
+          <a:bodyPr wrap="square">
+            <a:noAutofit/>
+          </a:bodyPr>
+          <a:lstStyle/>
+          <a:p>
+            <a:pPr lvl="0" marL="457200" indent="-228600">
+              <a:buFont typeface="Calibri"/>
+              <a:spcAft>
+                <a:spcPts val="1000"/>
+              </a:spcAft>
+              <a:buSzPct val="100000"/>
+              <a:buChar char="•"/>
+              <a:lnSpc>
+                <a:spcPts val="2200"/>
+              </a:lnSpc>
+            </a:pPr>
+            <a:r>
+              <a:rPr sz="2000" b="0">
+                <a:solidFill>
+                  <a:srgbClr val="333333"/>
+                </a:solidFill>
+                <a:latin typeface="Calibri"/>
+              </a:rPr>
+              <a:t>In the implement track</a:t>
+            </a:r>
+          </a:p>
+          <a:p>
+            <a:pPr lvl="0" marL="457200" indent="-228600">
+              <a:buFont typeface="Calibri"/>
+              <a:spcAft>
+                <a:spcPts val="1000"/>
+              </a:spcAft>
+              <a:buSzPct val="100000"/>
+              <a:buChar char="•"/>
+              <a:lnSpc>
+                <a:spcPts val="2200"/>
+              </a:lnSpc>
+            </a:pPr>
+            <a:r>
+              <a:rPr sz="2000" b="0">
+                <a:solidFill>
+                  <a:srgbClr val="333333"/>
+                </a:solidFill>
+                <a:latin typeface="Calibri"/>
+              </a:rPr>
+              <a:t>Parse `tiny_place.json`, run the algorithm with a deterministic seed</a:t>
+            </a:r>
+          </a:p>
+          <a:p>
+            <a:pPr lvl="0" marL="457200" indent="-228600">
+              <a:buFont typeface="Calibri"/>
+              <a:spcAft>
+                <a:spcPts val="1000"/>
+              </a:spcAft>
+              <a:buSzPct val="100000"/>
+              <a:buChar char="•"/>
+              <a:lnSpc>
+                <a:spcPts val="2200"/>
+              </a:lnSpc>
+            </a:pPr>
+            <a:r>
+              <a:rPr sz="2000" b="0">
+                <a:solidFill>
+                  <a:srgbClr val="333333"/>
+                </a:solidFill>
+                <a:latin typeface="Calibri"/>
+              </a:rPr>
+              <a:t>Match the browser goldens before you claim the checklist</a:t>
+            </a:r>
+          </a:p>
+        </p:txBody>
+      </p:sp>
+      <p:sp>
+        <p:nvSpPr>
+          <p:cNvPr id="4" name="TextBox 3"/>
+          <p:cNvSpPr txBox="1"/>
+          <p:nvPr/>
+        </p:nvSpPr>
+        <p:spPr>
+          <a:xfrm>
+            <a:off x="548640" y="6355080"/>
+            <a:ext cx="11064240" cy="320040"/>
+          </a:xfrm>
+          <a:prstGeom prst="rect">
+            <a:avLst/>
+          </a:prstGeom>
+          <a:noFill/>
+        </p:spPr>
+        <p:txBody>
+          <a:bodyPr wrap="square">
+            <a:noAutofit/>
+          </a:bodyPr>
+          <a:lstStyle/>
+          <a:p>
+            <a:pPr algn="r">
+              <a:lnSpc>
+                <a:spcPts val="2200"/>
+              </a:lnSpc>
+              <a:defRPr sz="1000" b="0">
+                <a:solidFill>
+                  <a:srgbClr val="666666"/>
+                </a:solidFill>
+                <a:latin typeface="Calibri"/>
+              </a:defRPr>
+            </a:pPr>
+            <a:r>
+              <a:t>learn_placement — 07 sa placement</a:t>
+            </a:r>
+          </a:p>
+        </p:txBody>
+      </p:sp>
+    </p:spTree>
+  </p:cSld>
+  <p:clrMapOvr>
+    <a:masterClrMapping/>
+  </p:clrMapOvr>
+</p:sld>
+</file>
+
+<file path=ppt/slides/slide13.xml><?xml version="1.0" encoding="utf-8"?>
+<p:sld xmlns:a="http://schemas.openxmlformats.org/drawingml/2006/main" xmlns:p="http://schemas.openxmlformats.org/presentationml/2006/main" xmlns:r="http://schemas.openxmlformats.org/officeDocument/2006/relationships">
+  <p:cSld>
+    <p:spTree>
+      <p:nvGrpSpPr>
+        <p:cNvPr id="1" name=""/>
+        <p:cNvGrpSpPr/>
+        <p:nvPr/>
+      </p:nvGrpSpPr>
+      <p:grpSpPr/>
+      <p:sp>
+        <p:nvSpPr>
+          <p:cNvPr id="2" name="TextBox 1"/>
+          <p:cNvSpPr txBox="1"/>
+          <p:nvPr/>
+        </p:nvSpPr>
+        <p:spPr>
+          <a:xfrm>
+            <a:off x="548640" y="411480"/>
+            <a:ext cx="11064240" cy="777240"/>
+          </a:xfrm>
+          <a:prstGeom prst="rect">
+            <a:avLst/>
+          </a:prstGeom>
+          <a:noFill/>
+        </p:spPr>
+        <p:txBody>
+          <a:bodyPr wrap="square">
+            <a:noAutofit/>
+          </a:bodyPr>
+          <a:lstStyle/>
+          <a:p>
+            <a:pPr>
+              <a:lnSpc>
+                <a:spcPts val="2200"/>
+              </a:lnSpc>
+            </a:pPr>
+            <a:r>
+              <a:rPr sz="2800" b="1">
+                <a:solidFill>
+                  <a:srgbClr val="1A1A2E"/>
+                </a:solidFill>
+                <a:latin typeface="Calibri"/>
+              </a:rPr>
+              <a:t>Pitfalls</a:t>
+            </a:r>
+          </a:p>
+        </p:txBody>
+      </p:sp>
+      <p:sp>
+        <p:nvSpPr>
+          <p:cNvPr id="3" name="TextBox 2"/>
+          <p:cNvSpPr txBox="1"/>
+          <p:nvPr/>
+        </p:nvSpPr>
+        <p:spPr>
+          <a:xfrm>
+            <a:off x="548640" y="1234440"/>
+            <a:ext cx="11064240" cy="4937760"/>
+          </a:xfrm>
+          <a:prstGeom prst="rect">
+            <a:avLst/>
+          </a:prstGeom>
+          <a:noFill/>
+        </p:spPr>
+        <p:txBody>
+          <a:bodyPr wrap="square">
+            <a:noAutofit/>
+          </a:bodyPr>
+          <a:lstStyle/>
+          <a:p>
+            <a:pPr lvl="0" marL="457200" indent="-228600">
+              <a:buFont typeface="Calibri"/>
+              <a:spcAft>
+                <a:spcPts val="1000"/>
+              </a:spcAft>
+              <a:buSzPct val="100000"/>
+              <a:buChar char="•"/>
+              <a:lnSpc>
+                <a:spcPts val="2200"/>
+              </a:lnSpc>
+            </a:pPr>
+            <a:r>
+              <a:rPr sz="2000" b="0">
+                <a:solidFill>
+                  <a:srgbClr val="333333"/>
+                </a:solidFill>
+                <a:latin typeface="Calibri"/>
+              </a:rPr>
+              <a:t>Common traps</a:t>
+            </a:r>
+          </a:p>
+        </p:txBody>
+      </p:sp>
+      <p:sp>
+        <p:nvSpPr>
+          <p:cNvPr id="4" name="TextBox 3"/>
+          <p:cNvSpPr txBox="1"/>
+          <p:nvPr/>
+        </p:nvSpPr>
+        <p:spPr>
+          <a:xfrm>
+            <a:off x="548640" y="6355080"/>
+            <a:ext cx="11064240" cy="320040"/>
+          </a:xfrm>
+          <a:prstGeom prst="rect">
+            <a:avLst/>
+          </a:prstGeom>
+          <a:noFill/>
+        </p:spPr>
+        <p:txBody>
+          <a:bodyPr wrap="square">
+            <a:noAutofit/>
+          </a:bodyPr>
+          <a:lstStyle/>
+          <a:p>
+            <a:pPr algn="r">
+              <a:lnSpc>
+                <a:spcPts val="2200"/>
+              </a:lnSpc>
+              <a:defRPr sz="1000" b="0">
+                <a:solidFill>
+                  <a:srgbClr val="666666"/>
+                </a:solidFill>
+                <a:latin typeface="Calibri"/>
+              </a:defRPr>
+            </a:pPr>
+            <a:r>
+              <a:t>learn_placement — 07 sa placement</a:t>
+            </a:r>
+          </a:p>
+        </p:txBody>
+      </p:sp>
+    </p:spTree>
+  </p:cSld>
+  <p:clrMapOvr>
+    <a:masterClrMapping/>
+  </p:clrMapOvr>
+</p:sld>
+</file>
+
+<file path=ppt/slides/slide14.xml><?xml version="1.0" encoding="utf-8"?>
+<p:sld xmlns:a="http://schemas.openxmlformats.org/drawingml/2006/main" xmlns:p="http://schemas.openxmlformats.org/presentationml/2006/main" xmlns:r="http://schemas.openxmlformats.org/officeDocument/2006/relationships">
+  <p:cSld>
+    <p:spTree>
+      <p:nvGrpSpPr>
+        <p:cNvPr id="1" name=""/>
+        <p:cNvGrpSpPr/>
+        <p:nvPr/>
+      </p:nvGrpSpPr>
+      <p:grpSpPr/>
+      <p:sp>
+        <p:nvSpPr>
+          <p:cNvPr id="2" name="TextBox 1"/>
+          <p:cNvSpPr txBox="1"/>
+          <p:nvPr/>
+        </p:nvSpPr>
+        <p:spPr>
+          <a:xfrm>
+            <a:off x="548640" y="411480"/>
+            <a:ext cx="11064240" cy="777240"/>
+          </a:xfrm>
+          <a:prstGeom prst="rect">
+            <a:avLst/>
+          </a:prstGeom>
+          <a:noFill/>
+        </p:spPr>
+        <p:txBody>
+          <a:bodyPr wrap="square">
+            <a:noAutofit/>
+          </a:bodyPr>
+          <a:lstStyle/>
+          <a:p>
+            <a:pPr>
+              <a:lnSpc>
+                <a:spcPts val="2200"/>
+              </a:lnSpc>
+            </a:pPr>
+            <a:r>
+              <a:rPr sz="2800" b="1">
+                <a:solidFill>
+                  <a:srgbClr val="1A1A2E"/>
+                </a:solidFill>
+                <a:latin typeface="Calibri"/>
+              </a:rPr>
               <a:t>Your turn</a:t>
             </a:r>
           </a:p>
@@ -4800,6 +5484,125 @@
               <a:t>Fix the seed so your golden stays stable across runs</a:t>
             </a:r>
           </a:p>
+        </p:txBody>
+      </p:sp>
+      <p:sp>
+        <p:nvSpPr>
+          <p:cNvPr id="4" name="TextBox 3"/>
+          <p:cNvSpPr txBox="1"/>
+          <p:nvPr/>
+        </p:nvSpPr>
+        <p:spPr>
+          <a:xfrm>
+            <a:off x="548640" y="6355080"/>
+            <a:ext cx="11064240" cy="320040"/>
+          </a:xfrm>
+          <a:prstGeom prst="rect">
+            <a:avLst/>
+          </a:prstGeom>
+          <a:noFill/>
+        </p:spPr>
+        <p:txBody>
+          <a:bodyPr wrap="square">
+            <a:noAutofit/>
+          </a:bodyPr>
+          <a:lstStyle/>
+          <a:p>
+            <a:pPr algn="r">
+              <a:lnSpc>
+                <a:spcPts val="2200"/>
+              </a:lnSpc>
+              <a:defRPr sz="1000" b="0">
+                <a:solidFill>
+                  <a:srgbClr val="666666"/>
+                </a:solidFill>
+                <a:latin typeface="Calibri"/>
+              </a:defRPr>
+            </a:pPr>
+            <a:r>
+              <a:t>learn_placement — 07 sa placement</a:t>
+            </a:r>
+          </a:p>
+        </p:txBody>
+      </p:sp>
+    </p:spTree>
+  </p:cSld>
+  <p:clrMapOvr>
+    <a:masterClrMapping/>
+  </p:clrMapOvr>
+</p:sld>
+</file>
+
+<file path=ppt/slides/slide3.xml><?xml version="1.0" encoding="utf-8"?>
+<p:sld xmlns:a="http://schemas.openxmlformats.org/drawingml/2006/main" xmlns:p="http://schemas.openxmlformats.org/presentationml/2006/main" xmlns:r="http://schemas.openxmlformats.org/officeDocument/2006/relationships">
+  <p:cSld>
+    <p:spTree>
+      <p:nvGrpSpPr>
+        <p:cNvPr id="1" name=""/>
+        <p:cNvGrpSpPr/>
+        <p:nvPr/>
+      </p:nvGrpSpPr>
+      <p:grpSpPr/>
+      <p:sp>
+        <p:nvSpPr>
+          <p:cNvPr id="2" name="TextBox 1"/>
+          <p:cNvSpPr txBox="1"/>
+          <p:nvPr/>
+        </p:nvSpPr>
+        <p:spPr>
+          <a:xfrm>
+            <a:off x="548640" y="411480"/>
+            <a:ext cx="11064240" cy="777240"/>
+          </a:xfrm>
+          <a:prstGeom prst="rect">
+            <a:avLst/>
+          </a:prstGeom>
+          <a:noFill/>
+        </p:spPr>
+        <p:txBody>
+          <a:bodyPr wrap="square">
+            <a:noAutofit/>
+          </a:bodyPr>
+          <a:lstStyle/>
+          <a:p>
+            <a:pPr>
+              <a:lnSpc>
+                <a:spcPts val="2200"/>
+              </a:lnSpc>
+            </a:pPr>
+            <a:r>
+              <a:rPr sz="2800" b="1">
+                <a:solidFill>
+                  <a:srgbClr val="1A1A2E"/>
+                </a:solidFill>
+                <a:latin typeface="Calibri"/>
+              </a:rPr>
+              <a:t>Pseudocode</a:t>
+            </a:r>
+          </a:p>
+        </p:txBody>
+      </p:sp>
+      <p:sp>
+        <p:nvSpPr>
+          <p:cNvPr id="3" name="TextBox 2"/>
+          <p:cNvSpPr txBox="1"/>
+          <p:nvPr/>
+        </p:nvSpPr>
+        <p:spPr>
+          <a:xfrm>
+            <a:off x="548640" y="1234440"/>
+            <a:ext cx="11064240" cy="4937760"/>
+          </a:xfrm>
+          <a:prstGeom prst="rect">
+            <a:avLst/>
+          </a:prstGeom>
+          <a:noFill/>
+        </p:spPr>
+        <p:txBody>
+          <a:bodyPr wrap="square">
+            <a:noAutofit/>
+          </a:bodyPr>
+          <a:lstStyle/>
           <a:p>
             <a:pPr lvl="0" marL="457200" indent="-228600">
               <a:buFont typeface="Calibri"/>
@@ -4819,7 +5622,51 @@
                 </a:solidFill>
                 <a:latin typeface="Calibri"/>
               </a:rPr>
-              <a:t>&lt;!-- algorithm-walkthrough --&gt;</a:t>
+              <a:t>Placement annealing jogs one cell per move under HPWL cost, accepts by Metropolis</a:t>
+            </a:r>
+          </a:p>
+          <a:p>
+            <a:pPr lvl="0" marL="457200" indent="-228600">
+              <a:buFont typeface="Calibri"/>
+              <a:spcAft>
+                <a:spcPts val="1000"/>
+              </a:spcAft>
+              <a:buSzPct val="100000"/>
+              <a:buChar char="•"/>
+              <a:lnSpc>
+                <a:spcPts val="2200"/>
+              </a:lnSpc>
+            </a:pPr>
+            <a:r>
+              <a:rPr sz="2000" b="0">
+                <a:solidFill>
+                  <a:srgbClr val="333333"/>
+                </a:solidFill>
+                <a:latin typeface="Calibri"/>
+              </a:rPr>
+              <a:t>Open this module's examples file and find the Pseudocode section</a:t>
+            </a:r>
+          </a:p>
+          <a:p>
+            <a:pPr lvl="0" marL="457200" indent="-228600">
+              <a:buFont typeface="Calibri"/>
+              <a:spcAft>
+                <a:spcPts val="1000"/>
+              </a:spcAft>
+              <a:buSzPct val="100000"/>
+              <a:buChar char="•"/>
+              <a:lnSpc>
+                <a:spcPts val="2200"/>
+              </a:lnSpc>
+            </a:pPr>
+            <a:r>
+              <a:rPr sz="2000" b="0">
+                <a:solidFill>
+                  <a:srgbClr val="333333"/>
+                </a:solidFill>
+                <a:latin typeface="Calibri"/>
+              </a:rPr>
+              <a:t>That written sketch is what you implement on the implement track and what the browser</a:t>
             </a:r>
           </a:p>
         </p:txBody>
@@ -4871,7 +5718,443 @@
 </p:sld>
 </file>
 
-<file path=ppt/slides/slide3.xml><?xml version="1.0" encoding="utf-8"?>
+<file path=ppt/slides/slide4.xml><?xml version="1.0" encoding="utf-8"?>
+<p:sld xmlns:a="http://schemas.openxmlformats.org/drawingml/2006/main" xmlns:p="http://schemas.openxmlformats.org/presentationml/2006/main" xmlns:r="http://schemas.openxmlformats.org/officeDocument/2006/relationships">
+  <p:cSld>
+    <p:spTree>
+      <p:nvGrpSpPr>
+        <p:cNvPr id="1" name=""/>
+        <p:cNvGrpSpPr/>
+        <p:nvPr/>
+      </p:nvGrpSpPr>
+      <p:grpSpPr/>
+      <p:sp>
+        <p:nvSpPr>
+          <p:cNvPr id="2" name="TextBox 1"/>
+          <p:cNvSpPr txBox="1"/>
+          <p:nvPr/>
+        </p:nvSpPr>
+        <p:spPr>
+          <a:xfrm>
+            <a:off x="548640" y="411480"/>
+            <a:ext cx="11064240" cy="777240"/>
+          </a:xfrm>
+          <a:prstGeom prst="rect">
+            <a:avLst/>
+          </a:prstGeom>
+          <a:noFill/>
+        </p:spPr>
+        <p:txBody>
+          <a:bodyPr wrap="square">
+            <a:noAutofit/>
+          </a:bodyPr>
+          <a:lstStyle/>
+          <a:p>
+            <a:pPr>
+              <a:lnSpc>
+                <a:spcPts val="2200"/>
+              </a:lnSpc>
+            </a:pPr>
+            <a:r>
+              <a:rPr sz="2800" b="1">
+                <a:solidFill>
+                  <a:srgbClr val="1A1A2E"/>
+                </a:solidFill>
+                <a:latin typeface="Calibri"/>
+              </a:rPr>
+              <a:t>Algorithm sketch</a:t>
+            </a:r>
+          </a:p>
+        </p:txBody>
+      </p:sp>
+      <p:sp>
+        <p:nvSpPr>
+          <p:cNvPr id="3" name="TextBox 2"/>
+          <p:cNvSpPr txBox="1"/>
+          <p:nvPr/>
+        </p:nvSpPr>
+        <p:spPr>
+          <a:xfrm>
+            <a:off x="548640" y="1234440"/>
+            <a:ext cx="11064240" cy="4937760"/>
+          </a:xfrm>
+          <a:prstGeom prst="rect">
+            <a:avLst/>
+          </a:prstGeom>
+          <a:noFill/>
+        </p:spPr>
+        <p:txBody>
+          <a:bodyPr wrap="square">
+            <a:noAutofit/>
+          </a:bodyPr>
+          <a:lstStyle/>
+          <a:p>
+            <a:pPr lvl="0" marL="457200" indent="-228600">
+              <a:buFont typeface="Calibri"/>
+              <a:spcAft>
+                <a:spcPts val="1000"/>
+              </a:spcAft>
+              <a:buSzPct val="100000"/>
+              <a:buChar char="•"/>
+              <a:lnSpc>
+                <a:spcPts val="2200"/>
+              </a:lnSpc>
+            </a:pPr>
+            <a:r>
+              <a:rPr sz="2000" b="0">
+                <a:solidFill>
+                  <a:srgbClr val="333333"/>
+                </a:solidFill>
+                <a:latin typeface="Calibri"/>
+              </a:rPr>
+              <a:t>Seed forty-two with sixty moves yields best HPWL near forty-nine point six from fifty-two</a:t>
+            </a:r>
+          </a:p>
+          <a:p>
+            <a:pPr lvl="0" marL="457200" indent="-228600">
+              <a:buFont typeface="Calibri"/>
+              <a:spcAft>
+                <a:spcPts val="1000"/>
+              </a:spcAft>
+              <a:buSzPct val="100000"/>
+              <a:buChar char="•"/>
+              <a:lnSpc>
+                <a:spcPts val="2200"/>
+              </a:lnSpc>
+            </a:pPr>
+            <a:r>
+              <a:rPr sz="2000" b="0">
+                <a:solidFill>
+                  <a:srgbClr val="333333"/>
+                </a:solidFill>
+                <a:latin typeface="Calibri"/>
+              </a:rPr>
+              <a:t>Lock the seed so goldens stay stable</a:t>
+            </a:r>
+          </a:p>
+        </p:txBody>
+      </p:sp>
+      <p:sp>
+        <p:nvSpPr>
+          <p:cNvPr id="4" name="TextBox 3"/>
+          <p:cNvSpPr txBox="1"/>
+          <p:nvPr/>
+        </p:nvSpPr>
+        <p:spPr>
+          <a:xfrm>
+            <a:off x="548640" y="6355080"/>
+            <a:ext cx="11064240" cy="320040"/>
+          </a:xfrm>
+          <a:prstGeom prst="rect">
+            <a:avLst/>
+          </a:prstGeom>
+          <a:noFill/>
+        </p:spPr>
+        <p:txBody>
+          <a:bodyPr wrap="square">
+            <a:noAutofit/>
+          </a:bodyPr>
+          <a:lstStyle/>
+          <a:p>
+            <a:pPr algn="r">
+              <a:lnSpc>
+                <a:spcPts val="2200"/>
+              </a:lnSpc>
+              <a:defRPr sz="1000" b="0">
+                <a:solidFill>
+                  <a:srgbClr val="666666"/>
+                </a:solidFill>
+                <a:latin typeface="Calibri"/>
+              </a:defRPr>
+            </a:pPr>
+            <a:r>
+              <a:t>learn_placement — 07 sa placement</a:t>
+            </a:r>
+          </a:p>
+        </p:txBody>
+      </p:sp>
+    </p:spTree>
+  </p:cSld>
+  <p:clrMapOvr>
+    <a:masterClrMapping/>
+  </p:clrMapOvr>
+</p:sld>
+</file>
+
+<file path=ppt/slides/slide5.xml><?xml version="1.0" encoding="utf-8"?>
+<p:sld xmlns:a="http://schemas.openxmlformats.org/drawingml/2006/main" xmlns:p="http://schemas.openxmlformats.org/presentationml/2006/main" xmlns:r="http://schemas.openxmlformats.org/officeDocument/2006/relationships">
+  <p:cSld>
+    <p:spTree>
+      <p:nvGrpSpPr>
+        <p:cNvPr id="1" name=""/>
+        <p:cNvGrpSpPr/>
+        <p:nvPr/>
+      </p:nvGrpSpPr>
+      <p:grpSpPr/>
+      <p:sp>
+        <p:nvSpPr>
+          <p:cNvPr id="2" name="TextBox 1"/>
+          <p:cNvSpPr txBox="1"/>
+          <p:nvPr/>
+        </p:nvSpPr>
+        <p:spPr>
+          <a:xfrm>
+            <a:off x="548640" y="411480"/>
+            <a:ext cx="11064240" cy="777240"/>
+          </a:xfrm>
+          <a:prstGeom prst="rect">
+            <a:avLst/>
+          </a:prstGeom>
+          <a:noFill/>
+        </p:spPr>
+        <p:txBody>
+          <a:bodyPr wrap="square">
+            <a:noAutofit/>
+          </a:bodyPr>
+          <a:lstStyle/>
+          <a:p>
+            <a:pPr>
+              <a:lnSpc>
+                <a:spcPts val="2200"/>
+              </a:lnSpc>
+            </a:pPr>
+            <a:r>
+              <a:rPr sz="2800" b="1">
+                <a:solidFill>
+                  <a:srgbClr val="1A1A2E"/>
+                </a:solidFill>
+                <a:latin typeface="Calibri"/>
+              </a:rPr>
+              <a:t>Algorithm sketch — try these</a:t>
+            </a:r>
+          </a:p>
+        </p:txBody>
+      </p:sp>
+      <p:sp>
+        <p:nvSpPr>
+          <p:cNvPr id="3" name="TextBox 2"/>
+          <p:cNvSpPr txBox="1"/>
+          <p:nvPr/>
+        </p:nvSpPr>
+        <p:spPr>
+          <a:xfrm>
+            <a:off x="548640" y="1143000"/>
+            <a:ext cx="11064240" cy="5029200"/>
+          </a:xfrm>
+          <a:prstGeom prst="rect">
+            <a:avLst/>
+          </a:prstGeom>
+          <a:solidFill>
+            <a:srgbClr val="F4F4F4"/>
+          </a:solidFill>
+        </p:spPr>
+        <p:txBody>
+          <a:bodyPr wrap="square">
+            <a:noAutofit/>
+          </a:bodyPr>
+          <a:lstStyle/>
+          <a:p>
+            <a:pPr>
+              <a:lnSpc>
+                <a:spcPts val="2200"/>
+              </a:lnSpc>
+              <a:spcAft>
+                <a:spcPts val="400"/>
+              </a:spcAft>
+            </a:pPr>
+            <a:r>
+              <a:rPr sz="2000" b="0">
+                <a:solidFill>
+                  <a:srgbClr val="333333"/>
+                </a:solidFill>
+                <a:latin typeface="Consolas"/>
+              </a:rPr>
+              <a:t>INPUT: positions, seed, moves, T0</a:t>
+            </a:r>
+          </a:p>
+          <a:p>
+            <a:pPr>
+              <a:lnSpc>
+                <a:spcPts val="2200"/>
+              </a:lnSpc>
+              <a:spcAft>
+                <a:spcPts val="400"/>
+              </a:spcAft>
+            </a:pPr>
+            <a:r>
+              <a:rPr sz="2000" b="0">
+                <a:solidFill>
+                  <a:srgbClr val="333333"/>
+                </a:solidFill>
+                <a:latin typeface="Consolas"/>
+              </a:rPr>
+              <a:t>OUTPUT: best positions + best HPWL</a:t>
+            </a:r>
+          </a:p>
+          <a:p>
+            <a:pPr>
+              <a:lnSpc>
+                <a:spcPts val="2200"/>
+              </a:lnSpc>
+              <a:spcAft>
+                <a:spcPts val="400"/>
+              </a:spcAft>
+            </a:pPr>
+            <a:r>
+              <a:rPr sz="2000" b="0">
+                <a:solidFill>
+                  <a:srgbClr val="333333"/>
+                </a:solidFill>
+                <a:latin typeface="Consolas"/>
+              </a:rPr>
+              <a:t>for i in 1..moves:</a:t>
+            </a:r>
+          </a:p>
+          <a:p>
+            <a:pPr>
+              <a:lnSpc>
+                <a:spcPts val="2200"/>
+              </a:lnSpc>
+              <a:spcAft>
+                <a:spcPts val="400"/>
+              </a:spcAft>
+            </a:pPr>
+            <a:r>
+              <a:rPr sz="2000" b="0">
+                <a:solidFill>
+                  <a:srgbClr val="333333"/>
+                </a:solidFill>
+                <a:latin typeface="Consolas"/>
+              </a:rPr>
+              <a:t>  jog one cell on one axis</a:t>
+            </a:r>
+          </a:p>
+          <a:p>
+            <a:pPr>
+              <a:lnSpc>
+                <a:spcPts val="2200"/>
+              </a:lnSpc>
+              <a:spcAft>
+                <a:spcPts val="400"/>
+              </a:spcAft>
+            </a:pPr>
+            <a:r>
+              <a:rPr sz="2000" b="0">
+                <a:solidFill>
+                  <a:srgbClr val="333333"/>
+                </a:solidFill>
+                <a:latin typeface="Consolas"/>
+              </a:rPr>
+              <a:t>  accept if ΔHPWL&lt;0 or rand&lt;e^(−Δ/T)</a:t>
+            </a:r>
+          </a:p>
+          <a:p>
+            <a:pPr>
+              <a:lnSpc>
+                <a:spcPts val="2200"/>
+              </a:lnSpc>
+              <a:spcAft>
+                <a:spcPts val="400"/>
+              </a:spcAft>
+            </a:pPr>
+            <a:r>
+              <a:rPr sz="2000" b="0">
+                <a:solidFill>
+                  <a:srgbClr val="333333"/>
+                </a:solidFill>
+                <a:latin typeface="Consolas"/>
+              </a:rPr>
+              <a:t>  keep best; cool T</a:t>
+            </a:r>
+          </a:p>
+          <a:p>
+            <a:pPr>
+              <a:lnSpc>
+                <a:spcPts val="2200"/>
+              </a:lnSpc>
+              <a:spcAft>
+                <a:spcPts val="400"/>
+              </a:spcAft>
+            </a:pPr>
+            <a:r>
+              <a:rPr sz="2000" b="0">
+                <a:solidFill>
+                  <a:srgbClr val="333333"/>
+                </a:solidFill>
+                <a:latin typeface="Consolas"/>
+              </a:rPr>
+              <a:t>GOLDEN seed=42, 60 moves → best≈49.6</a:t>
+            </a:r>
+          </a:p>
+          <a:p>
+            <a:pPr>
+              <a:lnSpc>
+                <a:spcPts val="2200"/>
+              </a:lnSpc>
+              <a:spcAft>
+                <a:spcPts val="400"/>
+              </a:spcAft>
+            </a:pPr>
+            <a:r>
+              <a:rPr sz="2000" b="0">
+                <a:solidFill>
+                  <a:srgbClr val="333333"/>
+                </a:solidFill>
+                <a:latin typeface="Consolas"/>
+              </a:rPr>
+              <a:t>accepted≈44 rejected≈16</a:t>
+            </a:r>
+          </a:p>
+        </p:txBody>
+      </p:sp>
+      <p:sp>
+        <p:nvSpPr>
+          <p:cNvPr id="4" name="TextBox 3"/>
+          <p:cNvSpPr txBox="1"/>
+          <p:nvPr/>
+        </p:nvSpPr>
+        <p:spPr>
+          <a:xfrm>
+            <a:off x="548640" y="6355080"/>
+            <a:ext cx="11064240" cy="320040"/>
+          </a:xfrm>
+          <a:prstGeom prst="rect">
+            <a:avLst/>
+          </a:prstGeom>
+          <a:noFill/>
+        </p:spPr>
+        <p:txBody>
+          <a:bodyPr wrap="square">
+            <a:noAutofit/>
+          </a:bodyPr>
+          <a:lstStyle/>
+          <a:p>
+            <a:pPr algn="r">
+              <a:lnSpc>
+                <a:spcPts val="2200"/>
+              </a:lnSpc>
+              <a:defRPr sz="1000" b="0">
+                <a:solidFill>
+                  <a:srgbClr val="666666"/>
+                </a:solidFill>
+                <a:latin typeface="Calibri"/>
+              </a:defRPr>
+            </a:pPr>
+            <a:r>
+              <a:t>learn_placement — 07 sa placement</a:t>
+            </a:r>
+          </a:p>
+        </p:txBody>
+      </p:sp>
+    </p:spTree>
+  </p:cSld>
+  <p:clrMapOvr>
+    <a:masterClrMapping/>
+  </p:clrMapOvr>
+</p:sld>
+</file>
+
+<file path=ppt/slides/slide6.xml><?xml version="1.0" encoding="utf-8"?>
 <p:sld xmlns:a="http://schemas.openxmlformats.org/drawingml/2006/main" xmlns:p="http://schemas.openxmlformats.org/presentationml/2006/main" xmlns:r="http://schemas.openxmlformats.org/officeDocument/2006/relationships">
   <p:cSld>
     <p:spTree>
@@ -5030,7 +6313,7 @@
 </p:sld>
 </file>
 
-<file path=ppt/slides/slide4.xml><?xml version="1.0" encoding="utf-8"?>
+<file path=ppt/slides/slide7.xml><?xml version="1.0" encoding="utf-8"?>
 <p:sld xmlns:a="http://schemas.openxmlformats.org/drawingml/2006/main" xmlns:p="http://schemas.openxmlformats.org/presentationml/2006/main" xmlns:r="http://schemas.openxmlformats.org/officeDocument/2006/relationships">
   <p:cSld>
     <p:spTree>
@@ -5189,7 +6472,7 @@
 </p:sld>
 </file>
 
-<file path=ppt/slides/slide5.xml><?xml version="1.0" encoding="utf-8"?>
+<file path=ppt/slides/slide8.xml><?xml version="1.0" encoding="utf-8"?>
 <p:sld xmlns:a="http://schemas.openxmlformats.org/drawingml/2006/main" xmlns:p="http://schemas.openxmlformats.org/presentationml/2006/main" xmlns:r="http://schemas.openxmlformats.org/officeDocument/2006/relationships">
   <p:cSld>
     <p:spTree>
@@ -5348,7 +6631,7 @@
 </p:sld>
 </file>
 
-<file path=ppt/slides/slide6.xml><?xml version="1.0" encoding="utf-8"?>
+<file path=ppt/slides/slide9.xml><?xml version="1.0" encoding="utf-8"?>
 <p:sld xmlns:a="http://schemas.openxmlformats.org/drawingml/2006/main" xmlns:p="http://schemas.openxmlformats.org/presentationml/2006/main" xmlns:r="http://schemas.openxmlformats.org/officeDocument/2006/relationships">
   <p:cSld>
     <p:spTree>
@@ -5463,553 +6746,6 @@
       <p:sp>
         <p:nvSpPr>
           <p:cNvPr id="5" name="TextBox 4"/>
-          <p:cNvSpPr txBox="1"/>
-          <p:nvPr/>
-        </p:nvSpPr>
-        <p:spPr>
-          <a:xfrm>
-            <a:off x="548640" y="6355080"/>
-            <a:ext cx="11064240" cy="320040"/>
-          </a:xfrm>
-          <a:prstGeom prst="rect">
-            <a:avLst/>
-          </a:prstGeom>
-          <a:noFill/>
-        </p:spPr>
-        <p:txBody>
-          <a:bodyPr wrap="square">
-            <a:noAutofit/>
-          </a:bodyPr>
-          <a:lstStyle/>
-          <a:p>
-            <a:pPr algn="r">
-              <a:lnSpc>
-                <a:spcPts val="2200"/>
-              </a:lnSpc>
-              <a:defRPr sz="1000" b="0">
-                <a:solidFill>
-                  <a:srgbClr val="666666"/>
-                </a:solidFill>
-                <a:latin typeface="Calibri"/>
-              </a:defRPr>
-            </a:pPr>
-            <a:r>
-              <a:t>learn_placement — 07 sa placement</a:t>
-            </a:r>
-          </a:p>
-        </p:txBody>
-      </p:sp>
-    </p:spTree>
-  </p:cSld>
-  <p:clrMapOvr>
-    <a:masterClrMapping/>
-  </p:clrMapOvr>
-</p:sld>
-</file>
-
-<file path=ppt/slides/slide7.xml><?xml version="1.0" encoding="utf-8"?>
-<p:sld xmlns:a="http://schemas.openxmlformats.org/drawingml/2006/main" xmlns:p="http://schemas.openxmlformats.org/presentationml/2006/main" xmlns:r="http://schemas.openxmlformats.org/officeDocument/2006/relationships">
-  <p:cSld>
-    <p:spTree>
-      <p:nvGrpSpPr>
-        <p:cNvPr id="1" name=""/>
-        <p:cNvGrpSpPr/>
-        <p:nvPr/>
-      </p:nvGrpSpPr>
-      <p:grpSpPr/>
-      <p:sp>
-        <p:nvSpPr>
-          <p:cNvPr id="2" name="TextBox 1"/>
-          <p:cNvSpPr txBox="1"/>
-          <p:nvPr/>
-        </p:nvSpPr>
-        <p:spPr>
-          <a:xfrm>
-            <a:off x="548640" y="411480"/>
-            <a:ext cx="11064240" cy="777240"/>
-          </a:xfrm>
-          <a:prstGeom prst="rect">
-            <a:avLst/>
-          </a:prstGeom>
-          <a:noFill/>
-        </p:spPr>
-        <p:txBody>
-          <a:bodyPr wrap="square">
-            <a:noAutofit/>
-          </a:bodyPr>
-          <a:lstStyle/>
-          <a:p>
-            <a:pPr>
-              <a:lnSpc>
-                <a:spcPts val="2200"/>
-              </a:lnSpc>
-            </a:pPr>
-            <a:r>
-              <a:rPr sz="2800" b="1">
-                <a:solidFill>
-                  <a:srgbClr val="1A1A2E"/>
-                </a:solidFill>
-                <a:latin typeface="Calibri"/>
-              </a:rPr>
-              <a:t>SA is a stochastic local search</a:t>
-            </a:r>
-          </a:p>
-        </p:txBody>
-      </p:sp>
-      <p:pic>
-        <p:nvPicPr>
-          <p:cNvPr id="3" name="Picture 2" descr="05-takeaway.png"/>
-          <p:cNvPicPr>
-            <a:picLocks noChangeAspect="1"/>
-          </p:cNvPicPr>
-          <p:nvPr/>
-        </p:nvPicPr>
-        <p:blipFill>
-          <a:blip r:embed="rId2"/>
-          <a:stretch>
-            <a:fillRect/>
-          </a:stretch>
-        </p:blipFill>
-        <p:spPr>
-          <a:xfrm>
-            <a:off x="548640" y="1143000"/>
-            <a:ext cx="9404113" cy="4572000"/>
-          </a:xfrm>
-          <a:prstGeom prst="rect">
-            <a:avLst/>
-          </a:prstGeom>
-        </p:spPr>
-      </p:pic>
-      <p:sp>
-        <p:nvSpPr>
-          <p:cNvPr id="4" name="TextBox 3"/>
-          <p:cNvSpPr txBox="1"/>
-          <p:nvPr/>
-        </p:nvSpPr>
-        <p:spPr>
-          <a:xfrm>
-            <a:off x="548640" y="5897880"/>
-            <a:ext cx="11064240" cy="411480"/>
-          </a:xfrm>
-          <a:prstGeom prst="rect">
-            <a:avLst/>
-          </a:prstGeom>
-          <a:noFill/>
-        </p:spPr>
-        <p:txBody>
-          <a:bodyPr wrap="square">
-            <a:noAutofit/>
-          </a:bodyPr>
-          <a:lstStyle/>
-          <a:p>
-            <a:pPr>
-              <a:lnSpc>
-                <a:spcPts val="2200"/>
-              </a:lnSpc>
-            </a:pPr>
-            <a:r>
-              <a:rPr sz="1200" b="0">
-                <a:solidFill>
-                  <a:srgbClr val="333333"/>
-                </a:solidFill>
-                <a:latin typeface="Calibri"/>
-              </a:rPr>
-              <a:t>SA is a stochastic local search</a:t>
-            </a:r>
-          </a:p>
-        </p:txBody>
-      </p:sp>
-      <p:sp>
-        <p:nvSpPr>
-          <p:cNvPr id="5" name="TextBox 4"/>
-          <p:cNvSpPr txBox="1"/>
-          <p:nvPr/>
-        </p:nvSpPr>
-        <p:spPr>
-          <a:xfrm>
-            <a:off x="548640" y="6355080"/>
-            <a:ext cx="11064240" cy="320040"/>
-          </a:xfrm>
-          <a:prstGeom prst="rect">
-            <a:avLst/>
-          </a:prstGeom>
-          <a:noFill/>
-        </p:spPr>
-        <p:txBody>
-          <a:bodyPr wrap="square">
-            <a:noAutofit/>
-          </a:bodyPr>
-          <a:lstStyle/>
-          <a:p>
-            <a:pPr algn="r">
-              <a:lnSpc>
-                <a:spcPts val="2200"/>
-              </a:lnSpc>
-              <a:defRPr sz="1000" b="0">
-                <a:solidFill>
-                  <a:srgbClr val="666666"/>
-                </a:solidFill>
-                <a:latin typeface="Calibri"/>
-              </a:defRPr>
-            </a:pPr>
-            <a:r>
-              <a:t>learn_placement — 07 sa placement</a:t>
-            </a:r>
-          </a:p>
-        </p:txBody>
-      </p:sp>
-    </p:spTree>
-  </p:cSld>
-  <p:clrMapOvr>
-    <a:masterClrMapping/>
-  </p:clrMapOvr>
-</p:sld>
-</file>
-
-<file path=ppt/slides/slide8.xml><?xml version="1.0" encoding="utf-8"?>
-<p:sld xmlns:a="http://schemas.openxmlformats.org/drawingml/2006/main" xmlns:p="http://schemas.openxmlformats.org/presentationml/2006/main" xmlns:r="http://schemas.openxmlformats.org/officeDocument/2006/relationships">
-  <p:cSld>
-    <p:spTree>
-      <p:nvGrpSpPr>
-        <p:cNvPr id="1" name=""/>
-        <p:cNvGrpSpPr/>
-        <p:nvPr/>
-      </p:nvGrpSpPr>
-      <p:grpSpPr/>
-      <p:sp>
-        <p:nvSpPr>
-          <p:cNvPr id="2" name="TextBox 1"/>
-          <p:cNvSpPr txBox="1"/>
-          <p:nvPr/>
-        </p:nvSpPr>
-        <p:spPr>
-          <a:xfrm>
-            <a:off x="548640" y="411480"/>
-            <a:ext cx="11064240" cy="777240"/>
-          </a:xfrm>
-          <a:prstGeom prst="rect">
-            <a:avLst/>
-          </a:prstGeom>
-          <a:noFill/>
-        </p:spPr>
-        <p:txBody>
-          <a:bodyPr wrap="square">
-            <a:noAutofit/>
-          </a:bodyPr>
-          <a:lstStyle/>
-          <a:p>
-            <a:pPr>
-              <a:lnSpc>
-                <a:spcPts val="2200"/>
-              </a:lnSpc>
-            </a:pPr>
-            <a:r>
-              <a:rPr sz="2800" b="1">
-                <a:solidFill>
-                  <a:srgbClr val="1A1A2E"/>
-                </a:solidFill>
-                <a:latin typeface="Calibri"/>
-              </a:rPr>
-              <a:t>Browser lab track</a:t>
-            </a:r>
-          </a:p>
-        </p:txBody>
-      </p:sp>
-      <p:sp>
-        <p:nvSpPr>
-          <p:cNvPr id="3" name="TextBox 2"/>
-          <p:cNvSpPr txBox="1"/>
-          <p:nvPr/>
-        </p:nvSpPr>
-        <p:spPr>
-          <a:xfrm>
-            <a:off x="548640" y="1234440"/>
-            <a:ext cx="11064240" cy="4937760"/>
-          </a:xfrm>
-          <a:prstGeom prst="rect">
-            <a:avLst/>
-          </a:prstGeom>
-          <a:noFill/>
-        </p:spPr>
-        <p:txBody>
-          <a:bodyPr wrap="square">
-            <a:noAutofit/>
-          </a:bodyPr>
-          <a:lstStyle/>
-          <a:p>
-            <a:pPr lvl="0" marL="457200" indent="-228600">
-              <a:buFont typeface="Calibri"/>
-              <a:spcAft>
-                <a:spcPts val="1000"/>
-              </a:spcAft>
-              <a:buSzPct val="100000"/>
-              <a:buChar char="•"/>
-              <a:lnSpc>
-                <a:spcPts val="2200"/>
-              </a:lnSpc>
-            </a:pPr>
-            <a:r>
-              <a:rPr sz="2000" b="0">
-                <a:solidFill>
-                  <a:srgbClr val="333333"/>
-                </a:solidFill>
-                <a:latin typeface="Calibri"/>
-              </a:rPr>
-              <a:t>In the browser lab track, open the </a:t>
-            </a:r>
-            <a:r>
-              <a:rPr sz="2000" b="1">
-                <a:solidFill>
-                  <a:srgbClr val="333333"/>
-                </a:solidFill>
-                <a:latin typeface="Calibri"/>
-              </a:rPr>
-              <a:t>sa-placement</a:t>
-            </a:r>
-            <a:r>
-              <a:rPr sz="2000" b="0">
-                <a:solidFill>
-                  <a:srgbClr val="333333"/>
-                </a:solidFill>
-                <a:latin typeface="Calibri"/>
-              </a:rPr>
-              <a:t> lab from the tools shelf</a:t>
-            </a:r>
-          </a:p>
-          <a:p>
-            <a:pPr lvl="0" marL="457200" indent="-228600">
-              <a:buFont typeface="Calibri"/>
-              <a:spcAft>
-                <a:spcPts val="1000"/>
-              </a:spcAft>
-              <a:buSzPct val="100000"/>
-              <a:buChar char="•"/>
-              <a:lnSpc>
-                <a:spcPts val="2200"/>
-              </a:lnSpc>
-            </a:pPr>
-            <a:r>
-              <a:rPr sz="2000" b="0">
-                <a:solidFill>
-                  <a:srgbClr val="333333"/>
-                </a:solidFill>
-                <a:latin typeface="Calibri"/>
-              </a:rPr>
-              <a:t>Load the starter placement, run the algorithm once</a:t>
-            </a:r>
-          </a:p>
-          <a:p>
-            <a:pPr lvl="0" marL="457200" indent="-228600">
-              <a:buFont typeface="Calibri"/>
-              <a:spcAft>
-                <a:spcPts val="1000"/>
-              </a:spcAft>
-              <a:buSzPct val="100000"/>
-              <a:buChar char="•"/>
-              <a:lnSpc>
-                <a:spcPts val="2200"/>
-              </a:lnSpc>
-            </a:pPr>
-            <a:r>
-              <a:rPr sz="2000" b="0">
-                <a:solidFill>
-                  <a:srgbClr val="333333"/>
-                </a:solidFill>
-                <a:latin typeface="Calibri"/>
-              </a:rPr>
-              <a:t>Work the challenges that lock the goldens</a:t>
-            </a:r>
-          </a:p>
-        </p:txBody>
-      </p:sp>
-      <p:sp>
-        <p:nvSpPr>
-          <p:cNvPr id="4" name="TextBox 3"/>
-          <p:cNvSpPr txBox="1"/>
-          <p:nvPr/>
-        </p:nvSpPr>
-        <p:spPr>
-          <a:xfrm>
-            <a:off x="548640" y="6355080"/>
-            <a:ext cx="11064240" cy="320040"/>
-          </a:xfrm>
-          <a:prstGeom prst="rect">
-            <a:avLst/>
-          </a:prstGeom>
-          <a:noFill/>
-        </p:spPr>
-        <p:txBody>
-          <a:bodyPr wrap="square">
-            <a:noAutofit/>
-          </a:bodyPr>
-          <a:lstStyle/>
-          <a:p>
-            <a:pPr algn="r">
-              <a:lnSpc>
-                <a:spcPts val="2200"/>
-              </a:lnSpc>
-              <a:defRPr sz="1000" b="0">
-                <a:solidFill>
-                  <a:srgbClr val="666666"/>
-                </a:solidFill>
-                <a:latin typeface="Calibri"/>
-              </a:defRPr>
-            </a:pPr>
-            <a:r>
-              <a:t>learn_placement — 07 sa placement</a:t>
-            </a:r>
-          </a:p>
-        </p:txBody>
-      </p:sp>
-    </p:spTree>
-  </p:cSld>
-  <p:clrMapOvr>
-    <a:masterClrMapping/>
-  </p:clrMapOvr>
-</p:sld>
-</file>
-
-<file path=ppt/slides/slide9.xml><?xml version="1.0" encoding="utf-8"?>
-<p:sld xmlns:a="http://schemas.openxmlformats.org/drawingml/2006/main" xmlns:p="http://schemas.openxmlformats.org/presentationml/2006/main" xmlns:r="http://schemas.openxmlformats.org/officeDocument/2006/relationships">
-  <p:cSld>
-    <p:spTree>
-      <p:nvGrpSpPr>
-        <p:cNvPr id="1" name=""/>
-        <p:cNvGrpSpPr/>
-        <p:nvPr/>
-      </p:nvGrpSpPr>
-      <p:grpSpPr/>
-      <p:sp>
-        <p:nvSpPr>
-          <p:cNvPr id="2" name="TextBox 1"/>
-          <p:cNvSpPr txBox="1"/>
-          <p:nvPr/>
-        </p:nvSpPr>
-        <p:spPr>
-          <a:xfrm>
-            <a:off x="548640" y="411480"/>
-            <a:ext cx="11064240" cy="777240"/>
-          </a:xfrm>
-          <a:prstGeom prst="rect">
-            <a:avLst/>
-          </a:prstGeom>
-          <a:noFill/>
-        </p:spPr>
-        <p:txBody>
-          <a:bodyPr wrap="square">
-            <a:noAutofit/>
-          </a:bodyPr>
-          <a:lstStyle/>
-          <a:p>
-            <a:pPr>
-              <a:lnSpc>
-                <a:spcPts val="2200"/>
-              </a:lnSpc>
-            </a:pPr>
-            <a:r>
-              <a:rPr sz="2800" b="1">
-                <a:solidFill>
-                  <a:srgbClr val="1A1A2E"/>
-                </a:solidFill>
-                <a:latin typeface="Calibri"/>
-              </a:rPr>
-              <a:t>Implement track</a:t>
-            </a:r>
-          </a:p>
-        </p:txBody>
-      </p:sp>
-      <p:sp>
-        <p:nvSpPr>
-          <p:cNvPr id="3" name="TextBox 2"/>
-          <p:cNvSpPr txBox="1"/>
-          <p:nvPr/>
-        </p:nvSpPr>
-        <p:spPr>
-          <a:xfrm>
-            <a:off x="548640" y="1234440"/>
-            <a:ext cx="11064240" cy="4937760"/>
-          </a:xfrm>
-          <a:prstGeom prst="rect">
-            <a:avLst/>
-          </a:prstGeom>
-          <a:noFill/>
-        </p:spPr>
-        <p:txBody>
-          <a:bodyPr wrap="square">
-            <a:noAutofit/>
-          </a:bodyPr>
-          <a:lstStyle/>
-          <a:p>
-            <a:pPr lvl="0" marL="457200" indent="-228600">
-              <a:buFont typeface="Calibri"/>
-              <a:spcAft>
-                <a:spcPts val="1000"/>
-              </a:spcAft>
-              <a:buSzPct val="100000"/>
-              <a:buChar char="•"/>
-              <a:lnSpc>
-                <a:spcPts val="2200"/>
-              </a:lnSpc>
-            </a:pPr>
-            <a:r>
-              <a:rPr sz="2000" b="0">
-                <a:solidFill>
-                  <a:srgbClr val="333333"/>
-                </a:solidFill>
-                <a:latin typeface="Calibri"/>
-              </a:rPr>
-              <a:t>In the implement track, open this module’s examples and the course `common/` solvers</a:t>
-            </a:r>
-          </a:p>
-          <a:p>
-            <a:pPr lvl="0" marL="457200" indent="-228600">
-              <a:buFont typeface="Calibri"/>
-              <a:spcAft>
-                <a:spcPts val="1000"/>
-              </a:spcAft>
-              <a:buSzPct val="100000"/>
-              <a:buChar char="•"/>
-              <a:lnSpc>
-                <a:spcPts val="2200"/>
-              </a:lnSpc>
-            </a:pPr>
-            <a:r>
-              <a:rPr sz="2000" b="0">
-                <a:solidFill>
-                  <a:srgbClr val="333333"/>
-                </a:solidFill>
-                <a:latin typeface="Calibri"/>
-              </a:rPr>
-              <a:t>Parse `tiny_place.json`, run the algorithm with a deterministic seed</a:t>
-            </a:r>
-          </a:p>
-          <a:p>
-            <a:pPr lvl="0" marL="457200" indent="-228600">
-              <a:buFont typeface="Calibri"/>
-              <a:spcAft>
-                <a:spcPts val="1000"/>
-              </a:spcAft>
-              <a:buSzPct val="100000"/>
-              <a:buChar char="•"/>
-              <a:lnSpc>
-                <a:spcPts val="2200"/>
-              </a:lnSpc>
-            </a:pPr>
-            <a:r>
-              <a:rPr sz="2000" b="0">
-                <a:solidFill>
-                  <a:srgbClr val="333333"/>
-                </a:solidFill>
-                <a:latin typeface="Calibri"/>
-              </a:rPr>
-              <a:t>Match the browser goldens before you claim the checklist</a:t>
-            </a:r>
-          </a:p>
-        </p:txBody>
-      </p:sp>
-      <p:sp>
-        <p:nvSpPr>
-          <p:cNvPr id="4" name="TextBox 3"/>
           <p:cNvSpPr txBox="1"/>
           <p:nvPr/>
         </p:nvSpPr>
